--- a/curso/pptx/S15.pptx
+++ b/curso/pptx/S15.pptx
@@ -5209,7 +5209,7 @@
                 </a:solidFill>
                 <a:latin typeface="Nunito Sans"/>
               </a:rPr>
-              <a:t>Exagera o cambia la idea</a:t>
+              <a:t>夸大或改变这个想法</a:t>
             </a:r>
           </a:p>
           <a:p>
@@ -5234,7 +5234,7 @@
                 </a:solidFill>
                 <a:latin typeface="Nunito Sans"/>
               </a:rPr>
-              <a:t>Ataca algo que no se ha dicho</a:t>
+              <a:t>攻击没有说过的东西</a:t>
             </a:r>
           </a:p>
           <a:p>
@@ -5259,7 +5259,7 @@
                 </a:solidFill>
                 <a:latin typeface="Nunito Sans"/>
               </a:rPr>
-              <a:t>Busca ganar fácil</a:t>
+              <a:t>想轻松取胜</a:t>
             </a:r>
           </a:p>
         </p:txBody>
@@ -5389,7 +5389,7 @@
                 </a:solidFill>
                 <a:latin typeface="Nunito Sans"/>
               </a:rPr>
-              <a:t>Repite la idea como la dijo el otro</a:t>
+              <a:t>照对方说的原样重复这个想法</a:t>
             </a:r>
           </a:p>
           <a:p>
@@ -5414,7 +5414,7 @@
                 </a:solidFill>
                 <a:latin typeface="Nunito Sans"/>
               </a:rPr>
-              <a:t>El otro diría: «sí, eso digo»</a:t>
+              <a:t>对方会说：“对，我就是这个意思”</a:t>
             </a:r>
           </a:p>
           <a:p>
@@ -5439,7 +5439,7 @@
                 </a:solidFill>
                 <a:latin typeface="Nunito Sans"/>
               </a:rPr>
-              <a:t>Responde a la idea real</a:t>
+              <a:t>回应的是真正的想法</a:t>
             </a:r>
           </a:p>
         </p:txBody>
@@ -7585,7 +7585,7 @@
                 </a:solidFill>
                 <a:latin typeface="Nunito Sans"/>
               </a:rPr>
-              <a:t>Un muñeco de paja se parece a una persona</a:t>
+              <a:t>稻草人看起来像一个人</a:t>
             </a:r>
           </a:p>
           <a:p>
@@ -7610,7 +7610,7 @@
                 </a:solidFill>
                 <a:latin typeface="Nunito Sans"/>
               </a:rPr>
-              <a:t>Pero se tumba de un golpe</a:t>
+              <a:t>但一推就倒</a:t>
             </a:r>
           </a:p>
           <a:p>
@@ -7635,7 +7635,7 @@
                 </a:solidFill>
                 <a:latin typeface="Nunito Sans"/>
               </a:rPr>
-              <a:t>Pregunta: </a:t>
+              <a:t>要问：</a:t>
             </a:r>
             <a:r>
               <a:rPr sz="2800" b="1">
@@ -7644,7 +7644,7 @@
                 </a:solidFill>
                 <a:latin typeface="Nunito Sans"/>
               </a:rPr>
-              <a:t>¿es eso exactamente lo que he dicho?</a:t>
+              <a:t>我说的真的就是这个意思吗？</a:t>
             </a:r>
           </a:p>
         </p:txBody>
@@ -7796,7 +7796,7 @@
                 </a:solidFill>
                 <a:latin typeface="Nunito Sans"/>
               </a:rPr>
-              <a:t>Exagerar:</a:t>
+              <a:t>夸大：</a:t>
             </a:r>
             <a:r>
               <a:rPr sz="2800" b="0">
@@ -7805,7 +7805,7 @@
                 </a:solidFill>
                 <a:latin typeface="Nunito Sans"/>
               </a:rPr>
-              <a:t> «menos azúcar» se convierte en «prohibir los dulces»</a:t>
+              <a:t>“少吃点糖”变成了“禁止吃甜食”</a:t>
             </a:r>
           </a:p>
           <a:p>
@@ -7830,7 +7830,7 @@
                 </a:solidFill>
                 <a:latin typeface="Nunito Sans"/>
               </a:rPr>
-              <a:t>Recortar:</a:t>
+              <a:t>删减：</a:t>
             </a:r>
             <a:r>
               <a:rPr sz="2800" b="0">
@@ -7839,7 +7839,7 @@
                 </a:solidFill>
                 <a:latin typeface="Nunito Sans"/>
               </a:rPr>
-              <a:t> quitar la parte que hace razonable la idea</a:t>
+              <a:t>去掉让这个想法合理的那一部分</a:t>
             </a:r>
           </a:p>
           <a:p>
@@ -7864,7 +7864,7 @@
                 </a:solidFill>
                 <a:latin typeface="Nunito Sans"/>
               </a:rPr>
-              <a:t>Inventar:</a:t>
+              <a:t>捏造：</a:t>
             </a:r>
             <a:r>
               <a:rPr sz="2800" b="0">
@@ -7873,7 +7873,7 @@
                 </a:solidFill>
                 <a:latin typeface="Nunito Sans"/>
               </a:rPr>
-              <a:t> poner en su boca algo que no ha dicho</a:t>
+              <a:t>把他没说过的话硬放进他嘴里</a:t>
             </a:r>
           </a:p>
         </p:txBody>

--- a/curso/pptx/S15.pptx
+++ b/curso/pptx/S15.pptx
@@ -4130,7 +4130,7 @@
                 </a:solidFill>
                 <a:latin typeface="Nunito Sans"/>
               </a:rPr>
-              <a:t>蕾雷：“午饭的时候，我们可以把手机放在书包里。”迪伦：“当然啦，你就是想禁止手机，让我们回到中世纪。”</a:t>
+              <a:t>一个女孩：“午饭的时候，我们可以把手机放在书包里。”一个男孩：“当然啦，你就是想禁止手机，让我们回到中世纪。”</a:t>
             </a:r>
           </a:p>
         </p:txBody>
@@ -4178,7 +4178,7 @@
                 </a:solidFill>
                 <a:latin typeface="Nunito Sans"/>
               </a:rPr>
-              <a:t>蕾雷说了什么？午饭时把手机放在书包里。</a:t>
+              <a:t>这个女孩说了什么？午饭时把手机放在书包里。</a:t>
             </a:r>
           </a:p>
           <a:p>
@@ -4203,7 +4203,7 @@
                 </a:solidFill>
                 <a:latin typeface="Nunito Sans"/>
               </a:rPr>
-              <a:t>迪伦攻击什么？“禁止手机”和“中世纪”。</a:t>
+              <a:t>这个男孩攻击什么？“禁止手机”和“中世纪”。</a:t>
             </a:r>
           </a:p>
           <a:p>
@@ -4253,7 +4253,7 @@
                 </a:solidFill>
                 <a:latin typeface="Nunito Sans"/>
               </a:rPr>
-              <a:t>结论：稻草人。蕾雷真正的想法依然没有得到回应。</a:t>
+              <a:t>结论：稻草人。这个女孩真正的想法依然没有得到回应。</a:t>
             </a:r>
           </a:p>
         </p:txBody>
@@ -4439,7 +4439,7 @@
                 </a:solidFill>
                 <a:latin typeface="Nunito Sans"/>
               </a:rPr>
-              <a:t>陈在一个视频下评论：“广告太多了。”另一个用户回复：“也就是说，创作者应该免费工作。说得真轻巧。”</a:t>
+              <a:t>一个男孩在一个视频下评论：“广告太多了。”另一个用户回复：“也就是说，创作者应该免费工作。说得真轻巧。”</a:t>
             </a:r>
           </a:p>
         </p:txBody>
@@ -4487,7 +4487,7 @@
                 </a:solidFill>
                 <a:latin typeface="Nunito Sans"/>
               </a:rPr>
-              <a:t>陈说了什么？说广告太多了。</a:t>
+              <a:t>这个男孩说了什么？说广告太多了。</a:t>
             </a:r>
           </a:p>
           <a:p>
@@ -4537,7 +4537,7 @@
                 </a:solidFill>
                 <a:latin typeface="Nunito Sans"/>
               </a:rPr>
-              <a:t>陈说过这话吗？没有：广告少一点，不等于一分钱都不赚。</a:t>
+              <a:t>这个男孩说过这话吗？没有：广告少一点，不等于一分钱都不赚。</a:t>
             </a:r>
           </a:p>
           <a:p>
@@ -4748,7 +4748,7 @@
                 </a:solidFill>
                 <a:latin typeface="Nunito Sans"/>
               </a:rPr>
-              <a:t>奈亚拉：“星期五的作业应该短一点。”奥马尔：“你是提议周末少布置作业。我不同意：星期一有考试。”</a:t>
+              <a:t>一个女孩：“星期五的作业应该短一点。”一个男孩：“你是提议周末少布置作业。我不同意：星期一有考试。”</a:t>
             </a:r>
           </a:p>
         </p:txBody>
@@ -4796,7 +4796,7 @@
                 </a:solidFill>
                 <a:latin typeface="Nunito Sans"/>
               </a:rPr>
-              <a:t>奥马尔概括得好吗？好：“短一点”就是“少一点作业”。</a:t>
+              <a:t>这个男孩概括得好吗？好：“短一点”就是“少一点作业”。</a:t>
             </a:r>
           </a:p>
           <a:p>
@@ -5625,7 +5625,7 @@
                 </a:solidFill>
                 <a:latin typeface="Nunito Sans"/>
               </a:rPr>
-              <a:t>艾托：“作业一点用也没有：应该全部取消。”玛亚伦：“艾托想取消所有作业，我不同意。”</a:t>
+              <a:t>一个男孩：“作业一点用也没有：应该全部取消。”一个女孩：“这个男孩想取消所有作业，我不同意。”</a:t>
             </a:r>
           </a:p>
         </p:txBody>
@@ -5723,7 +5723,7 @@
                 </a:solidFill>
                 <a:latin typeface="Nunito Sans"/>
               </a:rPr>
-              <a:t>但是艾托说过吗？说过：“应该全部取消”。</a:t>
+              <a:t>但是这个男孩说过吗？说过：“应该全部取消”。</a:t>
             </a:r>
           </a:p>
           <a:p>
@@ -5748,7 +5748,7 @@
                 </a:solidFill>
                 <a:latin typeface="Nunito Sans"/>
               </a:rPr>
-              <a:t>艾托会说：“对，我就是这个意思。”这是对一个本来就很极端的想法的</a:t>
+              <a:t>这个男孩会说：“对，我就是这个意思。”这是对一个本来就很极端的想法的</a:t>
             </a:r>
             <a:r>
               <a:rPr sz="2400" b="1">
@@ -7208,7 +7208,7 @@
                 </a:solidFill>
                 <a:latin typeface="Nunito Sans"/>
               </a:rPr>
-              <a:t>蕾雷：“午饭的时候，我们可以把手机放在书包里。”迪伦：“当然啦，你就是想禁止手机，让我们回到中世纪。”</a:t>
+              <a:t>一个女孩：“午饭的时候，我们可以把手机放在书包里。”一个男孩：“当然啦，你就是想禁止手机，让我们回到中世纪。”</a:t>
             </a:r>
           </a:p>
         </p:txBody>
@@ -7247,7 +7247,7 @@
                 </a:solidFill>
                 <a:latin typeface="Nunito Sans"/>
               </a:rPr>
-              <a:t>蕾雷说过这种话吗？迪伦在和什么想法作对？</a:t>
+              <a:t>这个女孩说过这种话吗？这个男孩在和什么想法作对？</a:t>
             </a:r>
           </a:p>
         </p:txBody>
